--- a/企业AI培训_交付包/高级课程_完整交付包/03_PPT课件/高级_规划层_PPT.pptx
+++ b/企业AI培训_交付包/高级课程_完整交付包/03_PPT课件/高级_规划层_PPT.pptx
@@ -2934,7 +2934,7 @@
                 <a:latin typeface="PingFang SC"/>
                 <a:ea typeface="PingFang SC"/>
               </a:rPr>
-              <a:t>物料、</a:t>
+              <a:t>资源、主数据、系统台账「一个事实只有一个源头」。主数据不统一，AI 读到的全是互相打架的账。</a:t>
             </a:r>
             <a:r>
               <a:rPr lang="en-US" sz="1125">
@@ -2944,7 +2944,7 @@
                 <a:latin typeface="PingFang SC"/>
                 <a:ea typeface="PingFang SC"/>
               </a:rPr>
-              <a:t>BOM</a:t>
+              <a:t/>
             </a:r>
             <a:r>
               <a:rPr lang="zh-CN" sz="1125">
@@ -2954,7 +2954,7 @@
                 <a:latin typeface="PingFang SC"/>
                 <a:ea typeface="PingFang SC"/>
               </a:rPr>
-              <a:t>、设备台账「一个事实只有一个源头」。主数据不统一，</a:t>
+              <a:t/>
             </a:r>
             <a:r>
               <a:rPr lang="en-US" sz="1125">
@@ -2964,7 +2964,7 @@
                 <a:latin typeface="PingFang SC"/>
                 <a:ea typeface="PingFang SC"/>
               </a:rPr>
-              <a:t>AI </a:t>
+              <a:t/>
             </a:r>
             <a:r>
               <a:rPr lang="zh-CN" sz="1125">
@@ -2974,7 +2974,7 @@
                 <a:latin typeface="PingFang SC"/>
                 <a:ea typeface="PingFang SC"/>
               </a:rPr>
-              <a:t>读到的全是互相打架的账。</a:t>
+              <a:t/>
             </a:r>
             <a:endParaRPr/>
           </a:p>
@@ -3847,7 +3847,7 @@
                 <a:latin typeface="PingFang SC"/>
                 <a:ea typeface="PingFang SC"/>
               </a:rPr>
-              <a:t>厂长汇报，不挂在</a:t>
+              <a:t>一把手汇报，不挂在</a:t>
             </a:r>
             <a:r>
               <a:rPr lang="en-US" sz="1125">
@@ -4635,7 +4635,7 @@
                 <a:latin typeface="PingFang SC"/>
                 <a:ea typeface="PingFang SC"/>
               </a:rPr>
-              <a:t>飞轮转起来的工厂，</a:t>
+              <a:t>飞轮转起来的企业，</a:t>
             </a:r>
             <a:r>
               <a:rPr lang="en-US" sz="1125">
@@ -5654,7 +5654,7 @@
                 <a:latin typeface="PingFang SC"/>
                 <a:ea typeface="PingFang SC"/>
               </a:rPr>
-              <a:t>OEE </a:t>
+              <a:t>效率 </a:t>
             </a:r>
             <a:r>
               <a:rPr lang="zh-CN" sz="1200" b="1">
@@ -5765,7 +5765,7 @@
                 <a:latin typeface="PingFang SC"/>
                 <a:ea typeface="PingFang SC"/>
               </a:rPr>
-              <a:t>MTBF </a:t>
+              <a:t>质量（差错率/一次通过）</a:t>
             </a:r>
             <a:r>
               <a:rPr lang="zh-CN" sz="1200" b="1">
@@ -5775,7 +5775,7 @@
                 <a:latin typeface="PingFang SC"/>
                 <a:ea typeface="PingFang SC"/>
               </a:rPr>
-              <a:t>平均故障间隔</a:t>
+              <a:t/>
             </a:r>
             <a:endParaRPr/>
           </a:p>
@@ -5876,7 +5876,7 @@
                 <a:latin typeface="PingFang SC"/>
                 <a:ea typeface="PingFang SC"/>
               </a:rPr>
-              <a:t>MTTR </a:t>
+              <a:t>成本（节约工时/单位成本）</a:t>
             </a:r>
             <a:r>
               <a:rPr lang="zh-CN" sz="1200" b="1">
@@ -5886,7 +5886,7 @@
                 <a:latin typeface="PingFang SC"/>
                 <a:ea typeface="PingFang SC"/>
               </a:rPr>
-              <a:t>平均修复时间</a:t>
+              <a:t/>
             </a:r>
             <a:endParaRPr/>
           </a:p>
@@ -5987,7 +5987,7 @@
                 <a:latin typeface="PingFang SC"/>
                 <a:ea typeface="PingFang SC"/>
               </a:rPr>
-              <a:t>不良率</a:t>
+              <a:t>差错率</a:t>
             </a:r>
             <a:r>
               <a:rPr lang="en-US" sz="1200" b="1">
@@ -7399,7 +7399,7 @@
                 <a:latin typeface="PingFang SC"/>
                 <a:ea typeface="PingFang SC"/>
               </a:rPr>
-              <a:t>先量现状：停机几小时、不良几</a:t>
+              <a:t>先量现状：中断多久、差错几</a:t>
             </a:r>
             <a:r>
               <a:rPr lang="en-US" sz="1200">
@@ -9214,7 +9214,7 @@
                 <a:latin typeface="PingFang SC"/>
                 <a:ea typeface="PingFang SC"/>
               </a:rPr>
-              <a:t>MAU/MEU + OEE / </a:t>
+              <a:t>MAU/MEU + 效率 / </a:t>
             </a:r>
             <a:r>
               <a:rPr lang="zh-CN" sz="1425">
@@ -9224,7 +9224,7 @@
                 <a:latin typeface="PingFang SC"/>
                 <a:ea typeface="PingFang SC"/>
               </a:rPr>
-              <a:t>停机</a:t>
+              <a:t>中断</a:t>
             </a:r>
             <a:r>
               <a:rPr lang="en-US" sz="1425">
@@ -9244,7 +9244,7 @@
                 <a:latin typeface="PingFang SC"/>
                 <a:ea typeface="PingFang SC"/>
               </a:rPr>
-              <a:t>不良</a:t>
+              <a:t>差错</a:t>
             </a:r>
             <a:r>
               <a:rPr lang="en-US" sz="1425">
@@ -9645,7 +9645,7 @@
                 <a:latin typeface="PingFang SC"/>
                 <a:ea typeface="PingFang SC"/>
               </a:rPr>
-              <a:t>每车间</a:t>
+              <a:t>每部门 1–2 名 Champion，选-担-落，课后不熄火</a:t>
             </a:r>
             <a:r>
               <a:rPr lang="en-US" sz="975">
@@ -9655,7 +9655,7 @@
                 <a:latin typeface="PingFang SC"/>
                 <a:ea typeface="PingFang SC"/>
               </a:rPr>
-              <a:t> 1–2 </a:t>
+              <a:t/>
             </a:r>
             <a:r>
               <a:rPr lang="zh-CN" sz="975">
@@ -9665,7 +9665,7 @@
                 <a:latin typeface="PingFang SC"/>
                 <a:ea typeface="PingFang SC"/>
               </a:rPr>
-              <a:t>名</a:t>
+              <a:t/>
             </a:r>
             <a:r>
               <a:rPr lang="en-US" sz="975">
@@ -9675,7 +9675,7 @@
                 <a:latin typeface="PingFang SC"/>
                 <a:ea typeface="PingFang SC"/>
               </a:rPr>
-              <a:t> Champion</a:t>
+              <a:t/>
             </a:r>
             <a:r>
               <a:rPr lang="zh-CN" sz="975">
@@ -9685,7 +9685,7 @@
                 <a:latin typeface="PingFang SC"/>
                 <a:ea typeface="PingFang SC"/>
               </a:rPr>
-              <a:t>，选</a:t>
+              <a:t/>
             </a:r>
             <a:r>
               <a:rPr lang="en-US" sz="975">
@@ -9695,7 +9695,7 @@
                 <a:latin typeface="PingFang SC"/>
                 <a:ea typeface="PingFang SC"/>
               </a:rPr>
-              <a:t>-</a:t>
+              <a:t/>
             </a:r>
             <a:r>
               <a:rPr lang="zh-CN" sz="975">
@@ -9705,7 +9705,7 @@
                 <a:latin typeface="PingFang SC"/>
                 <a:ea typeface="PingFang SC"/>
               </a:rPr>
-              <a:t>担</a:t>
+              <a:t/>
             </a:r>
             <a:r>
               <a:rPr lang="en-US" sz="975">
@@ -9715,7 +9715,7 @@
                 <a:latin typeface="PingFang SC"/>
                 <a:ea typeface="PingFang SC"/>
               </a:rPr>
-              <a:t>-</a:t>
+              <a:t/>
             </a:r>
             <a:r>
               <a:rPr lang="zh-CN" sz="975">
@@ -9725,7 +9725,7 @@
                 <a:latin typeface="PingFang SC"/>
                 <a:ea typeface="PingFang SC"/>
               </a:rPr>
-              <a:t>落，课后不熄火</a:t>
+              <a:t/>
             </a:r>
             <a:endParaRPr/>
           </a:p>
@@ -10672,7 +10672,7 @@
                 <a:latin typeface="PingFang SC"/>
                 <a:ea typeface="PingFang SC"/>
               </a:rPr>
-              <a:t>厂长发话</a:t>
+              <a:t>一把手发话</a:t>
             </a:r>
             <a:r>
               <a:rPr lang="en-US" sz="975">
@@ -12414,7 +12414,7 @@
                 <a:latin typeface="PingFang SC"/>
                 <a:ea typeface="PingFang SC"/>
               </a:rPr>
-              <a:t>OEE / </a:t>
+              <a:t>效率 / </a:t>
             </a:r>
             <a:r>
               <a:rPr lang="zh-CN" sz="1200" b="1">
@@ -12424,7 +12424,7 @@
                 <a:latin typeface="PingFang SC"/>
                 <a:ea typeface="PingFang SC"/>
               </a:rPr>
-              <a:t>停机时间</a:t>
+              <a:t>中断时间</a:t>
             </a:r>
             <a:endParaRPr/>
           </a:p>
@@ -12494,7 +12494,7 @@
                 <a:latin typeface="PingFang SC"/>
                 <a:ea typeface="PingFang SC"/>
               </a:rPr>
-              <a:t>不良率</a:t>
+              <a:t>差错率</a:t>
             </a:r>
             <a:r>
               <a:rPr lang="en-US" sz="1200" b="1">
@@ -13820,7 +13820,7 @@
                 <a:latin typeface="PingFang SC"/>
                 <a:ea typeface="PingFang SC"/>
               </a:rPr>
-              <a:t>智能工厂梯度</a:t>
+              <a:t>企业 AI 成熟度梯度</a:t>
             </a:r>
             <a:endParaRPr/>
           </a:p>
@@ -14144,7 +14144,7 @@
                 <a:latin typeface="PingFang SC"/>
                 <a:ea typeface="PingFang SC"/>
               </a:rPr>
-              <a:t>数字孪生</a:t>
+              <a:t>仿真</a:t>
             </a:r>
             <a:r>
               <a:rPr lang="en-US" sz="1050">
@@ -14164,7 +14164,7 @@
                 <a:latin typeface="PingFang SC"/>
                 <a:ea typeface="PingFang SC"/>
               </a:rPr>
-              <a:t>工业智能体</a:t>
+              <a:t>行业智能体</a:t>
             </a:r>
             <a:endParaRPr/>
           </a:p>
@@ -18031,7 +18031,7 @@
                 <a:latin typeface="PingFang SC"/>
                 <a:ea typeface="PingFang SC"/>
               </a:rPr>
-              <a:t>陕汽「数字工匠」</a:t>
+              <a:t>跨行业标杆：技能认证与人才梯队并进</a:t>
             </a:r>
             <a:r>
               <a:rPr lang="en-US" sz="1125">
@@ -18041,7 +18041,7 @@
                 <a:latin typeface="PingFang SC"/>
                 <a:ea typeface="PingFang SC"/>
               </a:rPr>
-              <a:t>+ </a:t>
+              <a:t/>
             </a:r>
             <a:r>
               <a:rPr lang="zh-CN" sz="1125">
@@ -18051,7 +18051,7 @@
                 <a:latin typeface="PingFang SC"/>
                 <a:ea typeface="PingFang SC"/>
               </a:rPr>
-              <a:t>青蓝蓄能站：技能认证与人才梯队并进</a:t>
+              <a:t/>
             </a:r>
             <a:endParaRPr/>
           </a:p>
@@ -18079,7 +18079,7 @@
                 <a:latin typeface="PingFang SC"/>
                 <a:ea typeface="PingFang SC"/>
               </a:rPr>
-              <a:t>灯塔工厂</a:t>
+              <a:t>灯塔企业</a:t>
             </a:r>
             <a:r>
               <a:rPr lang="en-US" sz="1125">
@@ -18210,7 +18210,7 @@
                 <a:latin typeface="PingFang SC"/>
                 <a:ea typeface="PingFang SC"/>
               </a:rPr>
-              <a:t>工厂梯度自评报告（含短板与晋级路径）</a:t>
+              <a:t>企业梯度自评报告（含短板与晋级路径）</a:t>
             </a:r>
             <a:endParaRPr/>
           </a:p>
@@ -20636,7 +20636,7 @@
                 <a:latin typeface="PingFang SC"/>
                 <a:ea typeface="PingFang SC"/>
               </a:rPr>
-              <a:t>陕汽</a:t>
+              <a:t>跨行业标杆等 12 个案例卡</a:t>
             </a:r>
             <a:r>
               <a:rPr lang="en-US" sz="1050">
@@ -20646,7 +20646,7 @@
                 <a:latin typeface="PingFang SC"/>
                 <a:ea typeface="PingFang SC"/>
               </a:rPr>
-              <a:t> / </a:t>
+              <a:t/>
             </a:r>
             <a:r>
               <a:rPr lang="zh-CN" sz="1050">
@@ -20656,7 +20656,7 @@
                 <a:latin typeface="PingFang SC"/>
                 <a:ea typeface="PingFang SC"/>
               </a:rPr>
-              <a:t>西门子</a:t>
+              <a:t/>
             </a:r>
             <a:r>
               <a:rPr lang="en-US" sz="1050">
@@ -20666,7 +20666,7 @@
                 <a:latin typeface="PingFang SC"/>
                 <a:ea typeface="PingFang SC"/>
               </a:rPr>
-              <a:t> / </a:t>
+              <a:t/>
             </a:r>
             <a:r>
               <a:rPr lang="zh-CN" sz="1050">
@@ -20676,7 +20676,7 @@
                 <a:latin typeface="PingFang SC"/>
                 <a:ea typeface="PingFang SC"/>
               </a:rPr>
-              <a:t>博世等</a:t>
+              <a:t/>
             </a:r>
             <a:r>
               <a:rPr lang="en-US" sz="1050">
@@ -20686,7 +20686,7 @@
                 <a:latin typeface="PingFang SC"/>
                 <a:ea typeface="PingFang SC"/>
               </a:rPr>
-              <a:t> 12 </a:t>
+              <a:t/>
             </a:r>
             <a:r>
               <a:rPr lang="zh-CN" sz="1050">
@@ -20696,7 +20696,7 @@
                 <a:latin typeface="PingFang SC"/>
                 <a:ea typeface="PingFang SC"/>
               </a:rPr>
-              <a:t>个案例卡</a:t>
+              <a:t/>
             </a:r>
             <a:endParaRPr/>
           </a:p>
@@ -23160,7 +23160,7 @@
                 <a:latin typeface="PingFang SC"/>
                 <a:ea typeface="PingFang SC"/>
               </a:rPr>
-              <a:t>厂长</a:t>
+              <a:t>一把手</a:t>
             </a:r>
             <a:r>
               <a:rPr lang="en-US" sz="1125">
@@ -23658,7 +23658,7 @@
                 <a:latin typeface="PingFang SC"/>
                 <a:ea typeface="PingFang SC"/>
               </a:rPr>
-              <a:t>智能工厂梯度</a:t>
+              <a:t>企业 AI 成熟度梯度</a:t>
             </a:r>
             <a:endParaRPr/>
           </a:p>
@@ -23793,7 +23793,7 @@
                 <a:latin typeface="PingFang SC"/>
                 <a:ea typeface="PingFang SC"/>
               </a:rPr>
-              <a:t>对标陕汽晋级路径，给自己工厂定坐标。</a:t>
+              <a:t>对标跨行业标杆晋级路径，给自己企业定坐标。</a:t>
             </a:r>
             <a:endParaRPr/>
           </a:p>
@@ -23900,7 +23900,7 @@
                 <a:latin typeface="PingFang SC"/>
                 <a:ea typeface="PingFang SC"/>
               </a:rPr>
-              <a:t>智能工厂三阶梯度</a:t>
+              <a:t>企业 AI 成熟度四级梯度</a:t>
             </a:r>
             <a:endParaRPr/>
           </a:p>
@@ -23935,7 +23935,7 @@
                 <a:latin typeface="PingFang SC"/>
                 <a:ea typeface="PingFang SC"/>
               </a:rPr>
-              <a:t>升级不是换设备，是「数据</a:t>
+              <a:t>升级不是换系统，是「数据</a:t>
             </a:r>
             <a:r>
               <a:rPr lang="en-US" sz="1275">
@@ -24721,7 +24721,7 @@
                 <a:latin typeface="PingFang SC"/>
                 <a:ea typeface="PingFang SC"/>
               </a:rPr>
-              <a:t>工业智能体</a:t>
+              <a:t>行业智能体</a:t>
             </a:r>
             <a:endParaRPr/>
           </a:p>
@@ -24927,7 +24927,7 @@
                 <a:latin typeface="PingFang SC"/>
                 <a:ea typeface="PingFang SC"/>
               </a:rPr>
-              <a:t>对标：陕汽晋级路径</a:t>
+              <a:t>对标：跨行业标杆晋级路径</a:t>
             </a:r>
             <a:endParaRPr/>
           </a:p>
@@ -25249,7 +25249,7 @@
                 <a:latin typeface="PingFang SC"/>
                 <a:ea typeface="PingFang SC"/>
               </a:rPr>
-              <a:t>自评四维度：给工厂定坐标</a:t>
+              <a:t>自评四维度：给企业定坐标</a:t>
             </a:r>
             <a:endParaRPr/>
           </a:p>
@@ -25471,7 +25471,7 @@
                 <a:latin typeface="PingFang SC"/>
                 <a:ea typeface="PingFang SC"/>
               </a:rPr>
-              <a:t>设备联网率</a:t>
+              <a:t>系统连通度 / 企业系统覆盖 / 网络带宽</a:t>
             </a:r>
             <a:r>
               <a:rPr lang="en-US" sz="1050">
@@ -25481,7 +25481,7 @@
                 <a:latin typeface="PingFang SC"/>
                 <a:ea typeface="PingFang SC"/>
               </a:rPr>
-              <a:t> / MES·ERP </a:t>
+              <a:t/>
             </a:r>
             <a:r>
               <a:rPr lang="zh-CN" sz="1050">
@@ -25491,7 +25491,7 @@
                 <a:latin typeface="PingFang SC"/>
                 <a:ea typeface="PingFang SC"/>
               </a:rPr>
-              <a:t>覆盖</a:t>
+              <a:t/>
             </a:r>
             <a:r>
               <a:rPr lang="en-US" sz="1050">
@@ -25501,7 +25501,7 @@
                 <a:latin typeface="PingFang SC"/>
                 <a:ea typeface="PingFang SC"/>
               </a:rPr>
-              <a:t> / </a:t>
+              <a:t/>
             </a:r>
             <a:r>
               <a:rPr lang="zh-CN" sz="1050">
@@ -25511,7 +25511,7 @@
                 <a:latin typeface="PingFang SC"/>
                 <a:ea typeface="PingFang SC"/>
               </a:rPr>
-              <a:t>网络带宽</a:t>
+              <a:t/>
             </a:r>
             <a:endParaRPr/>
           </a:p>
@@ -27284,7 +27284,7 @@
                 <a:latin typeface="PingFang SC"/>
                 <a:ea typeface="PingFang SC"/>
               </a:rPr>
-              <a:t>数字孪生</a:t>
+              <a:t>仿真</a:t>
             </a:r>
             <a:r>
               <a:rPr lang="en-US" sz="1425">
@@ -27304,7 +27304,7 @@
                 <a:latin typeface="PingFang SC"/>
                 <a:ea typeface="PingFang SC"/>
               </a:rPr>
-              <a:t>工业智能体</a:t>
+              <a:t>行业智能体</a:t>
             </a:r>
             <a:endParaRPr/>
           </a:p>
@@ -28208,7 +28208,7 @@
                 <a:latin typeface="PingFang SC"/>
                 <a:ea typeface="PingFang SC"/>
               </a:rPr>
-              <a:t>端（设备）</a:t>
+              <a:t>端（系统）</a:t>
             </a:r>
             <a:endParaRPr/>
           </a:p>
@@ -28588,7 +28588,7 @@
                 <a:latin typeface="PingFang SC"/>
                 <a:ea typeface="PingFang SC"/>
               </a:rPr>
-              <a:t>数字孪生：给决策装个沙盘</a:t>
+              <a:t>仿真：给决策装个沙盘</a:t>
             </a:r>
             <a:endParaRPr/>
           </a:p>
@@ -28625,7 +28625,7 @@
                 <a:latin typeface="PingFang SC"/>
                 <a:ea typeface="PingFang SC"/>
               </a:rPr>
-              <a:t>产线在虚拟空间里先跑一遍</a:t>
+              <a:t>流程在虚拟空间里先跑一遍</a:t>
             </a:r>
             <a:r>
               <a:rPr lang="en-US" sz="1125">
@@ -28852,7 +28852,7 @@
                 <a:latin typeface="PingFang SC"/>
                 <a:ea typeface="PingFang SC"/>
               </a:rPr>
-              <a:t>工业智能体：感知</a:t>
+              <a:t>行业智能体：感知</a:t>
             </a:r>
             <a:r>
               <a:rPr lang="en-US" sz="2550" b="1">
@@ -28947,7 +28947,7 @@
                 <a:latin typeface="PingFang SC"/>
                 <a:ea typeface="PingFang SC"/>
               </a:rPr>
-              <a:t>2027 </a:t>
+              <a:t>2027 年前约 1000 个行业智能体的赛道 —— 你要的是「养一群」还是「看别人养」</a:t>
             </a:r>
             <a:r>
               <a:rPr lang="zh-CN" sz="1275">
@@ -28957,7 +28957,7 @@
                 <a:latin typeface="PingFang SC"/>
                 <a:ea typeface="PingFang SC"/>
               </a:rPr>
-              <a:t>年前</a:t>
+              <a:t/>
             </a:r>
             <a:r>
               <a:rPr lang="en-US" sz="1275">
@@ -28967,7 +28967,7 @@
                 <a:latin typeface="PingFang SC"/>
                 <a:ea typeface="PingFang SC"/>
               </a:rPr>
-              <a:t> 1000 </a:t>
+              <a:t/>
             </a:r>
             <a:r>
               <a:rPr lang="zh-CN" sz="1275">
@@ -28977,7 +28977,7 @@
                 <a:latin typeface="PingFang SC"/>
                 <a:ea typeface="PingFang SC"/>
               </a:rPr>
-              <a:t>个工业智能体的赛道</a:t>
+              <a:t/>
             </a:r>
             <a:r>
               <a:rPr lang="en-US" sz="1275">
@@ -28987,7 +28987,7 @@
                 <a:latin typeface="PingFang SC"/>
                 <a:ea typeface="PingFang SC"/>
               </a:rPr>
-              <a:t> —— </a:t>
+              <a:t/>
             </a:r>
             <a:r>
               <a:rPr lang="zh-CN" sz="1275">
@@ -28997,7 +28997,7 @@
                 <a:latin typeface="PingFang SC"/>
                 <a:ea typeface="PingFang SC"/>
               </a:rPr>
-              <a:t>你要的是「养一群」还是「看别人养」</a:t>
+              <a:t/>
             </a:r>
             <a:endParaRPr/>
           </a:p>
@@ -29164,7 +29164,7 @@
                 <a:latin typeface="PingFang SC"/>
                 <a:ea typeface="PingFang SC"/>
               </a:rPr>
-              <a:t>读设备、物料、环境信号</a:t>
+              <a:t>读系统、资源、环境信号</a:t>
             </a:r>
             <a:endParaRPr/>
           </a:p>
@@ -30122,7 +30122,7 @@
                 <a:latin typeface="PingFang SC"/>
                 <a:ea typeface="PingFang SC"/>
               </a:rPr>
-              <a:t>5G + AI</a:t>
+              <a:t>实时连接 + AI</a:t>
             </a:r>
             <a:r>
               <a:rPr lang="zh-CN" sz="1650" b="1">
@@ -30217,7 +30217,7 @@
                 <a:latin typeface="PingFang SC"/>
                 <a:ea typeface="PingFang SC"/>
               </a:rPr>
-              <a:t> 5G / </a:t>
+              <a:t> 实时连接 / </a:t>
             </a:r>
             <a:r>
               <a:rPr lang="zh-CN" sz="1125">
@@ -30329,7 +30329,7 @@
                 <a:latin typeface="PingFang SC"/>
                 <a:ea typeface="PingFang SC"/>
               </a:rPr>
-              <a:t> + 5G</a:t>
+              <a:t> + 实时连接</a:t>
             </a:r>
             <a:r>
               <a:rPr lang="zh-CN" sz="1050" b="1">

--- a/企业AI培训_交付包/高级课程_完整交付包/03_PPT课件/高级_规划层_PPT.pptx
+++ b/企业AI培训_交付包/高级课程_完整交付包/03_PPT课件/高级_规划层_PPT.pptx
@@ -723,7 +723,7 @@
                 <a:latin typeface="PingFang SC"/>
                 <a:ea typeface="PingFang SC"/>
               </a:rPr>
-              <a:t>制造业企业</a:t>
+              <a:t>企业</a:t>
             </a:r>
             <a:r>
               <a:rPr lang="en-US" sz="1500" spc="225">
@@ -5117,7 +5117,7 @@
                 <a:latin typeface="PingFang SC"/>
                 <a:ea typeface="PingFang SC"/>
               </a:rPr>
-              <a:t>制造五指标</a:t>
+              <a:t>业务五指标</a:t>
             </a:r>
             <a:r>
               <a:rPr lang="en-US" sz="1425">
@@ -5533,7 +5533,7 @@
                 <a:latin typeface="PingFang SC"/>
                 <a:ea typeface="PingFang SC"/>
               </a:rPr>
-              <a:t>制造五指标（</a:t>
+              <a:t>业务五指标（</a:t>
             </a:r>
             <a:r>
               <a:rPr lang="en-US" sz="1350" b="1">
@@ -7230,7 +7230,7 @@
                 <a:latin typeface="PingFang SC"/>
                 <a:ea typeface="PingFang SC"/>
               </a:rPr>
-              <a:t>沙盘任务二：用这套模板算你厂里的一个真实项目</a:t>
+              <a:t>沙盘任务二：用这套模板算你企业里的一个真实项目</a:t>
             </a:r>
             <a:endParaRPr/>
           </a:p>
@@ -15739,7 +15739,7 @@
                 <a:latin typeface="PingFang SC"/>
                 <a:ea typeface="PingFang SC"/>
               </a:rPr>
-              <a:t>数据与算法按敏感级管理：核心数据不出厂，出网的先脱敏</a:t>
+              <a:t>数据与算法按敏感级管理：核心数据不出域，出网的先脱敏</a:t>
             </a:r>
             <a:endParaRPr/>
           </a:p>
@@ -15936,7 +15936,7 @@
                 <a:latin typeface="PingFang SC"/>
                 <a:ea typeface="PingFang SC"/>
               </a:rPr>
-              <a:t>证据链三件套；安全关键件处置权永远归人</a:t>
+              <a:t>证据链三件套；安全关键场景处置权永远归人</a:t>
             </a:r>
             <a:endParaRPr/>
           </a:p>
@@ -16767,7 +16767,7 @@
                 <a:latin typeface="PingFang SC"/>
                 <a:ea typeface="PingFang SC"/>
               </a:rPr>
-              <a:t>判断口径：不出厂的数据没有出境问题；出不了厂的数据就别出厂。</a:t>
+              <a:t>判断口径：中国统一 AI 法未立、群规已跑（内容标识 2025-09 / 拟人化 2026-07 施行）；EU AI Act 2026-08 全面执法 —— 现在搭体系 = 抢窗口。</a:t>
             </a:r>
             <a:endParaRPr/>
           </a:p>
@@ -17202,7 +17202,7 @@
                 <a:latin typeface="PingFang SC"/>
                 <a:ea typeface="PingFang SC"/>
               </a:rPr>
-              <a:t>结业不是考试，是把「你厂里的路线图」做完</a:t>
+              <a:t>结业不是考试，是把「你企业的路线图」做完</a:t>
             </a:r>
             <a:endParaRPr/>
           </a:p>
@@ -17444,7 +17444,7 @@
                 <a:latin typeface="PingFang SC"/>
                 <a:ea typeface="PingFang SC"/>
               </a:rPr>
-              <a:t>用四维度模型给本厂定位，找到短板维度与晋级路径</a:t>
+              <a:t>用四维度模型给本企业定位，找到短板维度与晋级路径</a:t>
             </a:r>
             <a:endParaRPr/>
           </a:p>
@@ -18568,7 +18568,7 @@
                 <a:latin typeface="PingFang SC"/>
                 <a:ea typeface="PingFang SC"/>
               </a:rPr>
-              <a:t>279 </a:t>
+              <a:t>国发 </a:t>
             </a:r>
             <a:r>
               <a:rPr lang="zh-CN" sz="1275">
@@ -18578,7 +18578,7 @@
                 <a:latin typeface="PingFang SC"/>
                 <a:ea typeface="PingFang SC"/>
               </a:rPr>
-              <a:t>号文</a:t>
+              <a:t>11 号</a:t>
             </a:r>
             <a:r>
               <a:rPr lang="en-US" sz="1275">
@@ -18618,7 +18618,7 @@
                 <a:latin typeface="PingFang SC"/>
                 <a:ea typeface="PingFang SC"/>
               </a:rPr>
-              <a:t>算法备案</a:t>
+              <a:t>内容标识</a:t>
             </a:r>
             <a:r>
               <a:rPr lang="en-US" sz="1275">
@@ -18638,7 +18638,7 @@
                 <a:latin typeface="PingFang SC"/>
                 <a:ea typeface="PingFang SC"/>
               </a:rPr>
-              <a:t>数据出境：政策每转一圈，能力要求升一级</a:t>
+              <a:t>拟人化办法：政策每转一圈，能力要求升一级</a:t>
             </a:r>
             <a:endParaRPr/>
           </a:p>
@@ -19412,7 +19412,7 @@
                 <a:latin typeface="PingFang SC"/>
                 <a:ea typeface="PingFang SC"/>
               </a:rPr>
-              <a:t>面向高管的三条前瞻信号</a:t>
+              <a:t>面向高管的四条前瞻信号</a:t>
             </a:r>
             <a:endParaRPr/>
           </a:p>
@@ -19467,7 +19467,7 @@
                 <a:latin typeface="PingFang SC"/>
                 <a:ea typeface="PingFang SC"/>
               </a:rPr>
-              <a:t>智能制造与</a:t>
+              <a:t>AI+各行业</a:t>
             </a:r>
             <a:r>
               <a:rPr lang="en-US" sz="1125">
@@ -19477,7 +19477,7 @@
                 <a:latin typeface="PingFang SC"/>
                 <a:ea typeface="PingFang SC"/>
               </a:rPr>
-              <a:t> AI+</a:t>
+              <a:t>融合</a:t>
             </a:r>
             <a:r>
               <a:rPr lang="zh-CN" sz="1125">
@@ -19487,7 +19487,7 @@
                 <a:latin typeface="PingFang SC"/>
                 <a:ea typeface="PingFang SC"/>
               </a:rPr>
-              <a:t>制造仍是主线，标杆示范扩围</a:t>
+              <a:t>深化，标杆扩围、地方真钱（模型券）开闸</a:t>
             </a:r>
             <a:endParaRPr/>
           </a:p>
@@ -19621,7 +19621,7 @@
                 <a:latin typeface="PingFang SC"/>
                 <a:ea typeface="PingFang SC"/>
               </a:rPr>
-              <a:t> </a:t>
+              <a:t>EU AI Act —— 2026-08 全面执法，第 4 条素养义务 = 三档培训即履约；出海高风险义务 2026-12 起</a:t>
             </a:r>
             <a:endParaRPr/>
           </a:p>
@@ -24385,7 +24385,7 @@
                 <a:latin typeface="PingFang SC"/>
                 <a:ea typeface="PingFang SC"/>
               </a:rPr>
-              <a:t>进关键工序</a:t>
+              <a:t>进关键流程</a:t>
             </a:r>
             <a:endParaRPr/>
           </a:p>
@@ -24984,7 +24984,7 @@
                 <a:latin typeface="PingFang SC"/>
                 <a:ea typeface="PingFang SC"/>
               </a:rPr>
-              <a:t>再上关键工序</a:t>
+              <a:t>再上关键流程</a:t>
             </a:r>
             <a:r>
               <a:rPr lang="en-US" sz="1125">
@@ -26173,7 +26173,7 @@
                 <a:latin typeface="PingFang SC"/>
                 <a:ea typeface="PingFang SC"/>
               </a:rPr>
-              <a:t>关键工序占比</a:t>
+              <a:t>关键流程占比</a:t>
             </a:r>
             <a:r>
               <a:rPr lang="en-US" sz="1050">
@@ -27997,7 +27997,7 @@
                 <a:latin typeface="PingFang SC"/>
                 <a:ea typeface="PingFang SC"/>
               </a:rPr>
-              <a:t>数据不出厂</a:t>
+              <a:t>数据不出域</a:t>
             </a:r>
             <a:r>
               <a:rPr lang="en-US" sz="1200">
@@ -28482,7 +28482,7 @@
                 <a:latin typeface="PingFang SC"/>
                 <a:ea typeface="PingFang SC"/>
               </a:rPr>
-              <a:t>小模型：便宜、快、数据不出厂。大模型：通用、强，但贵、慢、常要上云。先用小模型把</a:t>
+              <a:t>小模型：便宜、快、数据不出域。大模型：通用、强，但贵、慢、常要上云。先用小模型把</a:t>
             </a:r>
             <a:r>
               <a:rPr lang="en-US" sz="1050">
